--- a/09_주간보고/2026-10-29/주간보고_10_29_이지용.pptx
+++ b/09_주간보고/2026-10-29/주간보고_10_29_이지용.pptx
@@ -13992,21 +13992,21 @@
             <a:pPr lvl="1"/>
             <a:r>
               <a:rPr sz="1500"/>
-              <a:t>Task switching for a VLA robot arm (SmolVLA on PiPER)</a:t>
+              <a:t>Task switching for a robot arm (SmolVLA on PiPER)</a:t>
             </a:r>
           </a:p>
           <a:p>
             <a:pPr lvl="2"/>
             <a:r>
               <a:rPr sz="1300"/>
-              <a:t>I built a PiPER digital twin with up to 14 objects of 5 shapes</a:t>
+              <a:t>I built a simulation of our PiPER arm with up to 14 objects of 5 shapes</a:t>
             </a:r>
           </a:p>
           <a:p>
             <a:pPr lvl="2"/>
             <a:r>
               <a:rPr sz="1300"/>
-              <a:t>With a small correction step, pick and place success rose from 21% to 53%</a:t>
+              <a:t>With a small fix for the last few cm, the success rate rose from 21% to 53%</a:t>
             </a:r>
           </a:p>
         </p:txBody>
